--- a/River Sediment Modeling.pptx
+++ b/River Sediment Modeling.pptx
@@ -5,7 +5,7 @@
     <p:sldMasterId id="2147483648" r:id="rId1"/>
   </p:sldMasterIdLst>
   <p:notesMasterIdLst>
-    <p:notesMasterId r:id="rId16"/>
+    <p:notesMasterId r:id="rId20"/>
   </p:notesMasterIdLst>
   <p:sldIdLst>
     <p:sldId id="256" r:id="rId2"/>
@@ -21,7 +21,11 @@
     <p:sldId id="271" r:id="rId12"/>
     <p:sldId id="272" r:id="rId13"/>
     <p:sldId id="274" r:id="rId14"/>
-    <p:sldId id="270" r:id="rId15"/>
+    <p:sldId id="276" r:id="rId15"/>
+    <p:sldId id="275" r:id="rId16"/>
+    <p:sldId id="277" r:id="rId17"/>
+    <p:sldId id="278" r:id="rId18"/>
+    <p:sldId id="270" r:id="rId19"/>
   </p:sldIdLst>
   <p:sldSz cx="12192000" cy="6858000"/>
   <p:notesSz cx="6858000" cy="9144000"/>
@@ -210,7 +214,7 @@
           <a:p>
             <a:fld id="{57470B58-3F5F-4379-A1B1-C38E5919F3EB}" type="datetimeFigureOut">
               <a:rPr lang="zh-CN" altLang="en-US" smtClean="0"/>
-              <a:t>2026/3/23</a:t>
+              <a:t>2026/4/6</a:t>
             </a:fld>
             <a:endParaRPr lang="zh-CN" altLang="en-US"/>
           </a:p>
@@ -711,7 +715,7 @@
           <a:p>
             <a:fld id="{59A356CC-D3AA-463A-A30D-8B12EA0FD574}" type="datetimeFigureOut">
               <a:rPr lang="zh-CN" altLang="en-US" smtClean="0"/>
-              <a:t>2026/3/23</a:t>
+              <a:t>2026/4/6</a:t>
             </a:fld>
             <a:endParaRPr lang="zh-CN" altLang="en-US"/>
           </a:p>
@@ -911,7 +915,7 @@
           <a:p>
             <a:fld id="{59A356CC-D3AA-463A-A30D-8B12EA0FD574}" type="datetimeFigureOut">
               <a:rPr lang="zh-CN" altLang="en-US" smtClean="0"/>
-              <a:t>2026/3/23</a:t>
+              <a:t>2026/4/6</a:t>
             </a:fld>
             <a:endParaRPr lang="zh-CN" altLang="en-US"/>
           </a:p>
@@ -1121,7 +1125,7 @@
           <a:p>
             <a:fld id="{59A356CC-D3AA-463A-A30D-8B12EA0FD574}" type="datetimeFigureOut">
               <a:rPr lang="zh-CN" altLang="en-US" smtClean="0"/>
-              <a:t>2026/3/23</a:t>
+              <a:t>2026/4/6</a:t>
             </a:fld>
             <a:endParaRPr lang="zh-CN" altLang="en-US"/>
           </a:p>
@@ -1321,7 +1325,7 @@
           <a:p>
             <a:fld id="{59A356CC-D3AA-463A-A30D-8B12EA0FD574}" type="datetimeFigureOut">
               <a:rPr lang="zh-CN" altLang="en-US" smtClean="0"/>
-              <a:t>2026/3/23</a:t>
+              <a:t>2026/4/6</a:t>
             </a:fld>
             <a:endParaRPr lang="zh-CN" altLang="en-US"/>
           </a:p>
@@ -1597,7 +1601,7 @@
           <a:p>
             <a:fld id="{59A356CC-D3AA-463A-A30D-8B12EA0FD574}" type="datetimeFigureOut">
               <a:rPr lang="zh-CN" altLang="en-US" smtClean="0"/>
-              <a:t>2026/3/23</a:t>
+              <a:t>2026/4/6</a:t>
             </a:fld>
             <a:endParaRPr lang="zh-CN" altLang="en-US"/>
           </a:p>
@@ -1865,7 +1869,7 @@
           <a:p>
             <a:fld id="{59A356CC-D3AA-463A-A30D-8B12EA0FD574}" type="datetimeFigureOut">
               <a:rPr lang="zh-CN" altLang="en-US" smtClean="0"/>
-              <a:t>2026/3/23</a:t>
+              <a:t>2026/4/6</a:t>
             </a:fld>
             <a:endParaRPr lang="zh-CN" altLang="en-US"/>
           </a:p>
@@ -2280,7 +2284,7 @@
           <a:p>
             <a:fld id="{59A356CC-D3AA-463A-A30D-8B12EA0FD574}" type="datetimeFigureOut">
               <a:rPr lang="zh-CN" altLang="en-US" smtClean="0"/>
-              <a:t>2026/3/23</a:t>
+              <a:t>2026/4/6</a:t>
             </a:fld>
             <a:endParaRPr lang="zh-CN" altLang="en-US"/>
           </a:p>
@@ -2422,7 +2426,7 @@
           <a:p>
             <a:fld id="{59A356CC-D3AA-463A-A30D-8B12EA0FD574}" type="datetimeFigureOut">
               <a:rPr lang="zh-CN" altLang="en-US" smtClean="0"/>
-              <a:t>2026/3/23</a:t>
+              <a:t>2026/4/6</a:t>
             </a:fld>
             <a:endParaRPr lang="zh-CN" altLang="en-US"/>
           </a:p>
@@ -2535,7 +2539,7 @@
           <a:p>
             <a:fld id="{59A356CC-D3AA-463A-A30D-8B12EA0FD574}" type="datetimeFigureOut">
               <a:rPr lang="zh-CN" altLang="en-US" smtClean="0"/>
-              <a:t>2026/3/23</a:t>
+              <a:t>2026/4/6</a:t>
             </a:fld>
             <a:endParaRPr lang="zh-CN" altLang="en-US"/>
           </a:p>
@@ -2848,7 +2852,7 @@
           <a:p>
             <a:fld id="{59A356CC-D3AA-463A-A30D-8B12EA0FD574}" type="datetimeFigureOut">
               <a:rPr lang="zh-CN" altLang="en-US" smtClean="0"/>
-              <a:t>2026/3/23</a:t>
+              <a:t>2026/4/6</a:t>
             </a:fld>
             <a:endParaRPr lang="zh-CN" altLang="en-US"/>
           </a:p>
@@ -3137,7 +3141,7 @@
           <a:p>
             <a:fld id="{59A356CC-D3AA-463A-A30D-8B12EA0FD574}" type="datetimeFigureOut">
               <a:rPr lang="zh-CN" altLang="en-US" smtClean="0"/>
-              <a:t>2026/3/23</a:t>
+              <a:t>2026/4/6</a:t>
             </a:fld>
             <a:endParaRPr lang="zh-CN" altLang="en-US"/>
           </a:p>
@@ -3380,7 +3384,7 @@
           <a:p>
             <a:fld id="{59A356CC-D3AA-463A-A30D-8B12EA0FD574}" type="datetimeFigureOut">
               <a:rPr lang="zh-CN" altLang="en-US" smtClean="0"/>
-              <a:t>2026/3/23</a:t>
+              <a:t>2026/4/6</a:t>
             </a:fld>
             <a:endParaRPr lang="zh-CN" altLang="en-US"/>
           </a:p>
@@ -5226,6 +5230,458 @@
 </file>
 
 <file path=ppt/slides/slide14.xml><?xml version="1.0" encoding="utf-8"?>
+<p:sld xmlns:a="http://schemas.openxmlformats.org/drawingml/2006/main" xmlns:r="http://schemas.openxmlformats.org/officeDocument/2006/relationships" xmlns:p="http://schemas.openxmlformats.org/presentationml/2006/main">
+  <p:cSld>
+    <p:spTree>
+      <p:nvGrpSpPr>
+        <p:cNvPr id="1" name="">
+          <a:extLst>
+            <a:ext uri="{FF2B5EF4-FFF2-40B4-BE49-F238E27FC236}">
+              <a16:creationId xmlns:a16="http://schemas.microsoft.com/office/drawing/2014/main" id="{6670ECC6-9F74-F0AB-3076-5EFCB8FF73AF}"/>
+            </a:ext>
+          </a:extLst>
+        </p:cNvPr>
+        <p:cNvGrpSpPr/>
+        <p:nvPr/>
+      </p:nvGrpSpPr>
+      <p:grpSpPr>
+        <a:xfrm>
+          <a:off x="0" y="0"/>
+          <a:ext cx="0" cy="0"/>
+          <a:chOff x="0" y="0"/>
+          <a:chExt cx="0" cy="0"/>
+        </a:xfrm>
+      </p:grpSpPr>
+      <p:sp>
+        <p:nvSpPr>
+          <p:cNvPr id="2" name="Title 1">
+            <a:extLst>
+              <a:ext uri="{FF2B5EF4-FFF2-40B4-BE49-F238E27FC236}">
+                <a16:creationId xmlns:a16="http://schemas.microsoft.com/office/drawing/2014/main" id="{4FA79342-F993-3407-EC71-2A553F0F6342}"/>
+              </a:ext>
+            </a:extLst>
+          </p:cNvPr>
+          <p:cNvSpPr>
+            <a:spLocks noGrp="1"/>
+          </p:cNvSpPr>
+          <p:nvPr>
+            <p:ph type="title"/>
+          </p:nvPr>
+        </p:nvSpPr>
+        <p:spPr>
+          <a:xfrm>
+            <a:off x="922477" y="162585"/>
+            <a:ext cx="9378462" cy="1103508"/>
+          </a:xfrm>
+        </p:spPr>
+        <p:txBody>
+          <a:bodyPr>
+            <a:normAutofit fontScale="90000"/>
+          </a:bodyPr>
+          <a:lstStyle/>
+          <a:p>
+            <a:r>
+              <a:rPr lang="en-US" altLang="zh-CN" sz="4000" b="1" dirty="0"/>
+              <a:t>Sensitivity</a:t>
+            </a:r>
+            <a:br>
+              <a:rPr lang="en-US" altLang="zh-CN" sz="4000" b="1" dirty="0"/>
+            </a:br>
+            <a:r>
+              <a:rPr lang="en-US" altLang="zh-CN" sz="4000" b="1" dirty="0"/>
+              <a:t>-Baseline and Params Range</a:t>
+            </a:r>
+            <a:endParaRPr lang="zh-CN" altLang="en-US" b="1" dirty="0">
+              <a:solidFill>
+                <a:srgbClr val="FF0000"/>
+              </a:solidFill>
+            </a:endParaRPr>
+          </a:p>
+        </p:txBody>
+      </p:sp>
+      <p:pic>
+        <p:nvPicPr>
+          <p:cNvPr id="4" name="Picture 3">
+            <a:extLst>
+              <a:ext uri="{FF2B5EF4-FFF2-40B4-BE49-F238E27FC236}">
+                <a16:creationId xmlns:a16="http://schemas.microsoft.com/office/drawing/2014/main" id="{E1332DE1-AAC5-E3E1-2B02-E6E142BB7FCC}"/>
+              </a:ext>
+            </a:extLst>
+          </p:cNvPr>
+          <p:cNvPicPr>
+            <a:picLocks noChangeAspect="1"/>
+          </p:cNvPicPr>
+          <p:nvPr/>
+        </p:nvPicPr>
+        <p:blipFill>
+          <a:blip r:embed="rId2"/>
+          <a:stretch>
+            <a:fillRect/>
+          </a:stretch>
+        </p:blipFill>
+        <p:spPr>
+          <a:xfrm>
+            <a:off x="375913" y="1211553"/>
+            <a:ext cx="6655753" cy="5575327"/>
+          </a:xfrm>
+          <a:prstGeom prst="rect">
+            <a:avLst/>
+          </a:prstGeom>
+        </p:spPr>
+      </p:pic>
+    </p:spTree>
+    <p:extLst>
+      <p:ext uri="{BB962C8B-B14F-4D97-AF65-F5344CB8AC3E}">
+        <p14:creationId xmlns:p14="http://schemas.microsoft.com/office/powerpoint/2010/main" val="724691083"/>
+      </p:ext>
+    </p:extLst>
+  </p:cSld>
+  <p:clrMapOvr>
+    <a:masterClrMapping/>
+  </p:clrMapOvr>
+</p:sld>
+</file>
+
+<file path=ppt/slides/slide15.xml><?xml version="1.0" encoding="utf-8"?>
+<p:sld xmlns:a="http://schemas.openxmlformats.org/drawingml/2006/main" xmlns:r="http://schemas.openxmlformats.org/officeDocument/2006/relationships" xmlns:p="http://schemas.openxmlformats.org/presentationml/2006/main">
+  <p:cSld>
+    <p:spTree>
+      <p:nvGrpSpPr>
+        <p:cNvPr id="1" name="">
+          <a:extLst>
+            <a:ext uri="{FF2B5EF4-FFF2-40B4-BE49-F238E27FC236}">
+              <a16:creationId xmlns:a16="http://schemas.microsoft.com/office/drawing/2014/main" id="{B3E670AA-180D-89FD-9DF5-4BA5DFFFF120}"/>
+            </a:ext>
+          </a:extLst>
+        </p:cNvPr>
+        <p:cNvGrpSpPr/>
+        <p:nvPr/>
+      </p:nvGrpSpPr>
+      <p:grpSpPr>
+        <a:xfrm>
+          <a:off x="0" y="0"/>
+          <a:ext cx="0" cy="0"/>
+          <a:chOff x="0" y="0"/>
+          <a:chExt cx="0" cy="0"/>
+        </a:xfrm>
+      </p:grpSpPr>
+      <p:sp>
+        <p:nvSpPr>
+          <p:cNvPr id="2" name="Title 1">
+            <a:extLst>
+              <a:ext uri="{FF2B5EF4-FFF2-40B4-BE49-F238E27FC236}">
+                <a16:creationId xmlns:a16="http://schemas.microsoft.com/office/drawing/2014/main" id="{8059BF36-54D6-BAC4-5788-EB5D7FC1BEA8}"/>
+              </a:ext>
+            </a:extLst>
+          </p:cNvPr>
+          <p:cNvSpPr>
+            <a:spLocks noGrp="1"/>
+          </p:cNvSpPr>
+          <p:nvPr>
+            <p:ph type="title"/>
+          </p:nvPr>
+        </p:nvSpPr>
+        <p:spPr>
+          <a:xfrm>
+            <a:off x="922477" y="162585"/>
+            <a:ext cx="9378462" cy="1103508"/>
+          </a:xfrm>
+        </p:spPr>
+        <p:txBody>
+          <a:bodyPr>
+            <a:normAutofit fontScale="90000"/>
+          </a:bodyPr>
+          <a:lstStyle/>
+          <a:p>
+            <a:r>
+              <a:rPr lang="en-US" altLang="zh-CN" sz="4000" b="1" dirty="0"/>
+              <a:t>Sensitivity</a:t>
+            </a:r>
+            <a:br>
+              <a:rPr lang="en-US" altLang="zh-CN" sz="4000" b="1" dirty="0"/>
+            </a:br>
+            <a:r>
+              <a:rPr lang="en-US" altLang="zh-CN" sz="4000" b="1" dirty="0"/>
+              <a:t>-Baseline and Prams Range</a:t>
+            </a:r>
+            <a:endParaRPr lang="zh-CN" altLang="en-US" b="1" dirty="0">
+              <a:solidFill>
+                <a:srgbClr val="FF0000"/>
+              </a:solidFill>
+            </a:endParaRPr>
+          </a:p>
+        </p:txBody>
+      </p:sp>
+      <p:pic>
+        <p:nvPicPr>
+          <p:cNvPr id="8" name="Picture 7">
+            <a:extLst>
+              <a:ext uri="{FF2B5EF4-FFF2-40B4-BE49-F238E27FC236}">
+                <a16:creationId xmlns:a16="http://schemas.microsoft.com/office/drawing/2014/main" id="{76461D51-F98C-58BA-4FDB-C6DB99883FC1}"/>
+              </a:ext>
+            </a:extLst>
+          </p:cNvPr>
+          <p:cNvPicPr>
+            <a:picLocks noChangeAspect="1"/>
+          </p:cNvPicPr>
+          <p:nvPr/>
+        </p:nvPicPr>
+        <p:blipFill>
+          <a:blip r:embed="rId2"/>
+          <a:stretch>
+            <a:fillRect/>
+          </a:stretch>
+        </p:blipFill>
+        <p:spPr>
+          <a:xfrm>
+            <a:off x="922477" y="1333649"/>
+            <a:ext cx="9570206" cy="5182297"/>
+          </a:xfrm>
+          <a:prstGeom prst="rect">
+            <a:avLst/>
+          </a:prstGeom>
+        </p:spPr>
+      </p:pic>
+    </p:spTree>
+    <p:extLst>
+      <p:ext uri="{BB962C8B-B14F-4D97-AF65-F5344CB8AC3E}">
+        <p14:creationId xmlns:p14="http://schemas.microsoft.com/office/powerpoint/2010/main" val="971848892"/>
+      </p:ext>
+    </p:extLst>
+  </p:cSld>
+  <p:clrMapOvr>
+    <a:masterClrMapping/>
+  </p:clrMapOvr>
+</p:sld>
+</file>
+
+<file path=ppt/slides/slide16.xml><?xml version="1.0" encoding="utf-8"?>
+<p:sld xmlns:a="http://schemas.openxmlformats.org/drawingml/2006/main" xmlns:r="http://schemas.openxmlformats.org/officeDocument/2006/relationships" xmlns:p="http://schemas.openxmlformats.org/presentationml/2006/main">
+  <p:cSld>
+    <p:spTree>
+      <p:nvGrpSpPr>
+        <p:cNvPr id="1" name="">
+          <a:extLst>
+            <a:ext uri="{FF2B5EF4-FFF2-40B4-BE49-F238E27FC236}">
+              <a16:creationId xmlns:a16="http://schemas.microsoft.com/office/drawing/2014/main" id="{85D8184F-E3A1-0CE4-0BDE-3340D0204039}"/>
+            </a:ext>
+          </a:extLst>
+        </p:cNvPr>
+        <p:cNvGrpSpPr/>
+        <p:nvPr/>
+      </p:nvGrpSpPr>
+      <p:grpSpPr>
+        <a:xfrm>
+          <a:off x="0" y="0"/>
+          <a:ext cx="0" cy="0"/>
+          <a:chOff x="0" y="0"/>
+          <a:chExt cx="0" cy="0"/>
+        </a:xfrm>
+      </p:grpSpPr>
+      <p:sp>
+        <p:nvSpPr>
+          <p:cNvPr id="2" name="Title 1">
+            <a:extLst>
+              <a:ext uri="{FF2B5EF4-FFF2-40B4-BE49-F238E27FC236}">
+                <a16:creationId xmlns:a16="http://schemas.microsoft.com/office/drawing/2014/main" id="{C122E3DA-4961-9566-0BC0-EE6AF6663171}"/>
+              </a:ext>
+            </a:extLst>
+          </p:cNvPr>
+          <p:cNvSpPr>
+            <a:spLocks noGrp="1"/>
+          </p:cNvSpPr>
+          <p:nvPr>
+            <p:ph type="title"/>
+          </p:nvPr>
+        </p:nvSpPr>
+        <p:spPr>
+          <a:xfrm>
+            <a:off x="922477" y="162585"/>
+            <a:ext cx="9378462" cy="1103508"/>
+          </a:xfrm>
+        </p:spPr>
+        <p:txBody>
+          <a:bodyPr>
+            <a:normAutofit fontScale="90000"/>
+          </a:bodyPr>
+          <a:lstStyle/>
+          <a:p>
+            <a:r>
+              <a:rPr lang="en-US" altLang="zh-CN" sz="4000" b="1" dirty="0"/>
+              <a:t>Sensitivity</a:t>
+            </a:r>
+            <a:br>
+              <a:rPr lang="en-US" altLang="zh-CN" sz="4000" b="1" dirty="0"/>
+            </a:br>
+            <a:r>
+              <a:rPr lang="en-US" altLang="zh-CN" sz="4000" b="1" dirty="0"/>
+              <a:t>-Result without HCO3init</a:t>
+            </a:r>
+            <a:endParaRPr lang="zh-CN" altLang="en-US" b="1" dirty="0">
+              <a:solidFill>
+                <a:srgbClr val="FF0000"/>
+              </a:solidFill>
+            </a:endParaRPr>
+          </a:p>
+        </p:txBody>
+      </p:sp>
+      <p:pic>
+        <p:nvPicPr>
+          <p:cNvPr id="5" name="Picture 4">
+            <a:extLst>
+              <a:ext uri="{FF2B5EF4-FFF2-40B4-BE49-F238E27FC236}">
+                <a16:creationId xmlns:a16="http://schemas.microsoft.com/office/drawing/2014/main" id="{FE54F9CF-F46C-88EA-0912-4F6F2F7920AA}"/>
+              </a:ext>
+            </a:extLst>
+          </p:cNvPr>
+          <p:cNvPicPr>
+            <a:picLocks noChangeAspect="1"/>
+          </p:cNvPicPr>
+          <p:nvPr/>
+        </p:nvPicPr>
+        <p:blipFill>
+          <a:blip r:embed="rId2"/>
+          <a:stretch>
+            <a:fillRect/>
+          </a:stretch>
+        </p:blipFill>
+        <p:spPr>
+          <a:xfrm>
+            <a:off x="61844" y="457894"/>
+            <a:ext cx="12192000" cy="6295014"/>
+          </a:xfrm>
+          <a:prstGeom prst="rect">
+            <a:avLst/>
+          </a:prstGeom>
+        </p:spPr>
+      </p:pic>
+    </p:spTree>
+    <p:extLst>
+      <p:ext uri="{BB962C8B-B14F-4D97-AF65-F5344CB8AC3E}">
+        <p14:creationId xmlns:p14="http://schemas.microsoft.com/office/powerpoint/2010/main" val="3994379746"/>
+      </p:ext>
+    </p:extLst>
+  </p:cSld>
+  <p:clrMapOvr>
+    <a:masterClrMapping/>
+  </p:clrMapOvr>
+</p:sld>
+</file>
+
+<file path=ppt/slides/slide17.xml><?xml version="1.0" encoding="utf-8"?>
+<p:sld xmlns:a="http://schemas.openxmlformats.org/drawingml/2006/main" xmlns:r="http://schemas.openxmlformats.org/officeDocument/2006/relationships" xmlns:p="http://schemas.openxmlformats.org/presentationml/2006/main">
+  <p:cSld>
+    <p:spTree>
+      <p:nvGrpSpPr>
+        <p:cNvPr id="1" name="">
+          <a:extLst>
+            <a:ext uri="{FF2B5EF4-FFF2-40B4-BE49-F238E27FC236}">
+              <a16:creationId xmlns:a16="http://schemas.microsoft.com/office/drawing/2014/main" id="{D566B343-FFA2-7591-91B1-CC8B2D325AE8}"/>
+            </a:ext>
+          </a:extLst>
+        </p:cNvPr>
+        <p:cNvGrpSpPr/>
+        <p:nvPr/>
+      </p:nvGrpSpPr>
+      <p:grpSpPr>
+        <a:xfrm>
+          <a:off x="0" y="0"/>
+          <a:ext cx="0" cy="0"/>
+          <a:chOff x="0" y="0"/>
+          <a:chExt cx="0" cy="0"/>
+        </a:xfrm>
+      </p:grpSpPr>
+      <p:sp>
+        <p:nvSpPr>
+          <p:cNvPr id="2" name="Title 1">
+            <a:extLst>
+              <a:ext uri="{FF2B5EF4-FFF2-40B4-BE49-F238E27FC236}">
+                <a16:creationId xmlns:a16="http://schemas.microsoft.com/office/drawing/2014/main" id="{B6A55471-9BE6-942A-8A32-CF6E913FBD8A}"/>
+              </a:ext>
+            </a:extLst>
+          </p:cNvPr>
+          <p:cNvSpPr>
+            <a:spLocks noGrp="1"/>
+          </p:cNvSpPr>
+          <p:nvPr>
+            <p:ph type="title"/>
+          </p:nvPr>
+        </p:nvSpPr>
+        <p:spPr>
+          <a:xfrm>
+            <a:off x="922477" y="162585"/>
+            <a:ext cx="9378462" cy="1103508"/>
+          </a:xfrm>
+        </p:spPr>
+        <p:txBody>
+          <a:bodyPr>
+            <a:normAutofit fontScale="90000"/>
+          </a:bodyPr>
+          <a:lstStyle/>
+          <a:p>
+            <a:r>
+              <a:rPr lang="en-US" altLang="zh-CN" sz="4000" b="1" dirty="0"/>
+              <a:t>Sensitivity</a:t>
+            </a:r>
+            <a:br>
+              <a:rPr lang="en-US" altLang="zh-CN" sz="4000" b="1" dirty="0"/>
+            </a:br>
+            <a:r>
+              <a:rPr lang="en-US" altLang="zh-CN" sz="4000" b="1" dirty="0"/>
+              <a:t>-Result with HCO3init</a:t>
+            </a:r>
+            <a:endParaRPr lang="zh-CN" altLang="en-US" b="1" dirty="0">
+              <a:solidFill>
+                <a:srgbClr val="FF0000"/>
+              </a:solidFill>
+            </a:endParaRPr>
+          </a:p>
+        </p:txBody>
+      </p:sp>
+      <p:pic>
+        <p:nvPicPr>
+          <p:cNvPr id="4" name="Picture 3">
+            <a:extLst>
+              <a:ext uri="{FF2B5EF4-FFF2-40B4-BE49-F238E27FC236}">
+                <a16:creationId xmlns:a16="http://schemas.microsoft.com/office/drawing/2014/main" id="{CC5F728C-6FAE-91E9-149D-BFE262B978A1}"/>
+              </a:ext>
+            </a:extLst>
+          </p:cNvPr>
+          <p:cNvPicPr>
+            <a:picLocks noChangeAspect="1"/>
+          </p:cNvPicPr>
+          <p:nvPr/>
+        </p:nvPicPr>
+        <p:blipFill>
+          <a:blip r:embed="rId2"/>
+          <a:stretch>
+            <a:fillRect/>
+          </a:stretch>
+        </p:blipFill>
+        <p:spPr>
+          <a:xfrm>
+            <a:off x="176695" y="546058"/>
+            <a:ext cx="12192000" cy="6630205"/>
+          </a:xfrm>
+          <a:prstGeom prst="rect">
+            <a:avLst/>
+          </a:prstGeom>
+        </p:spPr>
+      </p:pic>
+    </p:spTree>
+    <p:extLst>
+      <p:ext uri="{BB962C8B-B14F-4D97-AF65-F5344CB8AC3E}">
+        <p14:creationId xmlns:p14="http://schemas.microsoft.com/office/powerpoint/2010/main" val="3419194241"/>
+      </p:ext>
+    </p:extLst>
+  </p:cSld>
+  <p:clrMapOvr>
+    <a:masterClrMapping/>
+  </p:clrMapOvr>
+</p:sld>
+</file>
+
+<file path=ppt/slides/slide18.xml><?xml version="1.0" encoding="utf-8"?>
 <p:sld xmlns:a="http://schemas.openxmlformats.org/drawingml/2006/main" xmlns:r="http://schemas.openxmlformats.org/officeDocument/2006/relationships" xmlns:p="http://schemas.openxmlformats.org/presentationml/2006/main">
   <p:cSld>
     <p:spTree>

--- a/River Sediment Modeling.pptx
+++ b/River Sediment Modeling.pptx
@@ -5,7 +5,7 @@
     <p:sldMasterId id="2147483648" r:id="rId1"/>
   </p:sldMasterIdLst>
   <p:notesMasterIdLst>
-    <p:notesMasterId r:id="rId20"/>
+    <p:notesMasterId r:id="rId16"/>
   </p:notesMasterIdLst>
   <p:sldIdLst>
     <p:sldId id="256" r:id="rId2"/>
@@ -21,11 +21,7 @@
     <p:sldId id="271" r:id="rId12"/>
     <p:sldId id="272" r:id="rId13"/>
     <p:sldId id="274" r:id="rId14"/>
-    <p:sldId id="276" r:id="rId15"/>
-    <p:sldId id="275" r:id="rId16"/>
-    <p:sldId id="277" r:id="rId17"/>
-    <p:sldId id="278" r:id="rId18"/>
-    <p:sldId id="270" r:id="rId19"/>
+    <p:sldId id="270" r:id="rId15"/>
   </p:sldIdLst>
   <p:sldSz cx="12192000" cy="6858000"/>
   <p:notesSz cx="6858000" cy="9144000"/>
@@ -214,7 +210,7 @@
           <a:p>
             <a:fld id="{57470B58-3F5F-4379-A1B1-C38E5919F3EB}" type="datetimeFigureOut">
               <a:rPr lang="zh-CN" altLang="en-US" smtClean="0"/>
-              <a:t>2026/4/6</a:t>
+              <a:t>2026/3/23</a:t>
             </a:fld>
             <a:endParaRPr lang="zh-CN" altLang="en-US"/>
           </a:p>
@@ -715,7 +711,7 @@
           <a:p>
             <a:fld id="{59A356CC-D3AA-463A-A30D-8B12EA0FD574}" type="datetimeFigureOut">
               <a:rPr lang="zh-CN" altLang="en-US" smtClean="0"/>
-              <a:t>2026/4/6</a:t>
+              <a:t>2026/3/23</a:t>
             </a:fld>
             <a:endParaRPr lang="zh-CN" altLang="en-US"/>
           </a:p>
@@ -915,7 +911,7 @@
           <a:p>
             <a:fld id="{59A356CC-D3AA-463A-A30D-8B12EA0FD574}" type="datetimeFigureOut">
               <a:rPr lang="zh-CN" altLang="en-US" smtClean="0"/>
-              <a:t>2026/4/6</a:t>
+              <a:t>2026/3/23</a:t>
             </a:fld>
             <a:endParaRPr lang="zh-CN" altLang="en-US"/>
           </a:p>
@@ -1125,7 +1121,7 @@
           <a:p>
             <a:fld id="{59A356CC-D3AA-463A-A30D-8B12EA0FD574}" type="datetimeFigureOut">
               <a:rPr lang="zh-CN" altLang="en-US" smtClean="0"/>
-              <a:t>2026/4/6</a:t>
+              <a:t>2026/3/23</a:t>
             </a:fld>
             <a:endParaRPr lang="zh-CN" altLang="en-US"/>
           </a:p>
@@ -1325,7 +1321,7 @@
           <a:p>
             <a:fld id="{59A356CC-D3AA-463A-A30D-8B12EA0FD574}" type="datetimeFigureOut">
               <a:rPr lang="zh-CN" altLang="en-US" smtClean="0"/>
-              <a:t>2026/4/6</a:t>
+              <a:t>2026/3/23</a:t>
             </a:fld>
             <a:endParaRPr lang="zh-CN" altLang="en-US"/>
           </a:p>
@@ -1601,7 +1597,7 @@
           <a:p>
             <a:fld id="{59A356CC-D3AA-463A-A30D-8B12EA0FD574}" type="datetimeFigureOut">
               <a:rPr lang="zh-CN" altLang="en-US" smtClean="0"/>
-              <a:t>2026/4/6</a:t>
+              <a:t>2026/3/23</a:t>
             </a:fld>
             <a:endParaRPr lang="zh-CN" altLang="en-US"/>
           </a:p>
@@ -1869,7 +1865,7 @@
           <a:p>
             <a:fld id="{59A356CC-D3AA-463A-A30D-8B12EA0FD574}" type="datetimeFigureOut">
               <a:rPr lang="zh-CN" altLang="en-US" smtClean="0"/>
-              <a:t>2026/4/6</a:t>
+              <a:t>2026/3/23</a:t>
             </a:fld>
             <a:endParaRPr lang="zh-CN" altLang="en-US"/>
           </a:p>
@@ -2284,7 +2280,7 @@
           <a:p>
             <a:fld id="{59A356CC-D3AA-463A-A30D-8B12EA0FD574}" type="datetimeFigureOut">
               <a:rPr lang="zh-CN" altLang="en-US" smtClean="0"/>
-              <a:t>2026/4/6</a:t>
+              <a:t>2026/3/23</a:t>
             </a:fld>
             <a:endParaRPr lang="zh-CN" altLang="en-US"/>
           </a:p>
@@ -2426,7 +2422,7 @@
           <a:p>
             <a:fld id="{59A356CC-D3AA-463A-A30D-8B12EA0FD574}" type="datetimeFigureOut">
               <a:rPr lang="zh-CN" altLang="en-US" smtClean="0"/>
-              <a:t>2026/4/6</a:t>
+              <a:t>2026/3/23</a:t>
             </a:fld>
             <a:endParaRPr lang="zh-CN" altLang="en-US"/>
           </a:p>
@@ -2539,7 +2535,7 @@
           <a:p>
             <a:fld id="{59A356CC-D3AA-463A-A30D-8B12EA0FD574}" type="datetimeFigureOut">
               <a:rPr lang="zh-CN" altLang="en-US" smtClean="0"/>
-              <a:t>2026/4/6</a:t>
+              <a:t>2026/3/23</a:t>
             </a:fld>
             <a:endParaRPr lang="zh-CN" altLang="en-US"/>
           </a:p>
@@ -2852,7 +2848,7 @@
           <a:p>
             <a:fld id="{59A356CC-D3AA-463A-A30D-8B12EA0FD574}" type="datetimeFigureOut">
               <a:rPr lang="zh-CN" altLang="en-US" smtClean="0"/>
-              <a:t>2026/4/6</a:t>
+              <a:t>2026/3/23</a:t>
             </a:fld>
             <a:endParaRPr lang="zh-CN" altLang="en-US"/>
           </a:p>
@@ -3141,7 +3137,7 @@
           <a:p>
             <a:fld id="{59A356CC-D3AA-463A-A30D-8B12EA0FD574}" type="datetimeFigureOut">
               <a:rPr lang="zh-CN" altLang="en-US" smtClean="0"/>
-              <a:t>2026/4/6</a:t>
+              <a:t>2026/3/23</a:t>
             </a:fld>
             <a:endParaRPr lang="zh-CN" altLang="en-US"/>
           </a:p>
@@ -3384,7 +3380,7 @@
           <a:p>
             <a:fld id="{59A356CC-D3AA-463A-A30D-8B12EA0FD574}" type="datetimeFigureOut">
               <a:rPr lang="zh-CN" altLang="en-US" smtClean="0"/>
-              <a:t>2026/4/6</a:t>
+              <a:t>2026/3/23</a:t>
             </a:fld>
             <a:endParaRPr lang="zh-CN" altLang="en-US"/>
           </a:p>
@@ -5230,458 +5226,6 @@
 </file>
 
 <file path=ppt/slides/slide14.xml><?xml version="1.0" encoding="utf-8"?>
-<p:sld xmlns:a="http://schemas.openxmlformats.org/drawingml/2006/main" xmlns:r="http://schemas.openxmlformats.org/officeDocument/2006/relationships" xmlns:p="http://schemas.openxmlformats.org/presentationml/2006/main">
-  <p:cSld>
-    <p:spTree>
-      <p:nvGrpSpPr>
-        <p:cNvPr id="1" name="">
-          <a:extLst>
-            <a:ext uri="{FF2B5EF4-FFF2-40B4-BE49-F238E27FC236}">
-              <a16:creationId xmlns:a16="http://schemas.microsoft.com/office/drawing/2014/main" id="{6670ECC6-9F74-F0AB-3076-5EFCB8FF73AF}"/>
-            </a:ext>
-          </a:extLst>
-        </p:cNvPr>
-        <p:cNvGrpSpPr/>
-        <p:nvPr/>
-      </p:nvGrpSpPr>
-      <p:grpSpPr>
-        <a:xfrm>
-          <a:off x="0" y="0"/>
-          <a:ext cx="0" cy="0"/>
-          <a:chOff x="0" y="0"/>
-          <a:chExt cx="0" cy="0"/>
-        </a:xfrm>
-      </p:grpSpPr>
-      <p:sp>
-        <p:nvSpPr>
-          <p:cNvPr id="2" name="Title 1">
-            <a:extLst>
-              <a:ext uri="{FF2B5EF4-FFF2-40B4-BE49-F238E27FC236}">
-                <a16:creationId xmlns:a16="http://schemas.microsoft.com/office/drawing/2014/main" id="{4FA79342-F993-3407-EC71-2A553F0F6342}"/>
-              </a:ext>
-            </a:extLst>
-          </p:cNvPr>
-          <p:cNvSpPr>
-            <a:spLocks noGrp="1"/>
-          </p:cNvSpPr>
-          <p:nvPr>
-            <p:ph type="title"/>
-          </p:nvPr>
-        </p:nvSpPr>
-        <p:spPr>
-          <a:xfrm>
-            <a:off x="922477" y="162585"/>
-            <a:ext cx="9378462" cy="1103508"/>
-          </a:xfrm>
-        </p:spPr>
-        <p:txBody>
-          <a:bodyPr>
-            <a:normAutofit fontScale="90000"/>
-          </a:bodyPr>
-          <a:lstStyle/>
-          <a:p>
-            <a:r>
-              <a:rPr lang="en-US" altLang="zh-CN" sz="4000" b="1" dirty="0"/>
-              <a:t>Sensitivity</a:t>
-            </a:r>
-            <a:br>
-              <a:rPr lang="en-US" altLang="zh-CN" sz="4000" b="1" dirty="0"/>
-            </a:br>
-            <a:r>
-              <a:rPr lang="en-US" altLang="zh-CN" sz="4000" b="1" dirty="0"/>
-              <a:t>-Baseline and Params Range</a:t>
-            </a:r>
-            <a:endParaRPr lang="zh-CN" altLang="en-US" b="1" dirty="0">
-              <a:solidFill>
-                <a:srgbClr val="FF0000"/>
-              </a:solidFill>
-            </a:endParaRPr>
-          </a:p>
-        </p:txBody>
-      </p:sp>
-      <p:pic>
-        <p:nvPicPr>
-          <p:cNvPr id="4" name="Picture 3">
-            <a:extLst>
-              <a:ext uri="{FF2B5EF4-FFF2-40B4-BE49-F238E27FC236}">
-                <a16:creationId xmlns:a16="http://schemas.microsoft.com/office/drawing/2014/main" id="{E1332DE1-AAC5-E3E1-2B02-E6E142BB7FCC}"/>
-              </a:ext>
-            </a:extLst>
-          </p:cNvPr>
-          <p:cNvPicPr>
-            <a:picLocks noChangeAspect="1"/>
-          </p:cNvPicPr>
-          <p:nvPr/>
-        </p:nvPicPr>
-        <p:blipFill>
-          <a:blip r:embed="rId2"/>
-          <a:stretch>
-            <a:fillRect/>
-          </a:stretch>
-        </p:blipFill>
-        <p:spPr>
-          <a:xfrm>
-            <a:off x="375913" y="1211553"/>
-            <a:ext cx="6655753" cy="5575327"/>
-          </a:xfrm>
-          <a:prstGeom prst="rect">
-            <a:avLst/>
-          </a:prstGeom>
-        </p:spPr>
-      </p:pic>
-    </p:spTree>
-    <p:extLst>
-      <p:ext uri="{BB962C8B-B14F-4D97-AF65-F5344CB8AC3E}">
-        <p14:creationId xmlns:p14="http://schemas.microsoft.com/office/powerpoint/2010/main" val="724691083"/>
-      </p:ext>
-    </p:extLst>
-  </p:cSld>
-  <p:clrMapOvr>
-    <a:masterClrMapping/>
-  </p:clrMapOvr>
-</p:sld>
-</file>
-
-<file path=ppt/slides/slide15.xml><?xml version="1.0" encoding="utf-8"?>
-<p:sld xmlns:a="http://schemas.openxmlformats.org/drawingml/2006/main" xmlns:r="http://schemas.openxmlformats.org/officeDocument/2006/relationships" xmlns:p="http://schemas.openxmlformats.org/presentationml/2006/main">
-  <p:cSld>
-    <p:spTree>
-      <p:nvGrpSpPr>
-        <p:cNvPr id="1" name="">
-          <a:extLst>
-            <a:ext uri="{FF2B5EF4-FFF2-40B4-BE49-F238E27FC236}">
-              <a16:creationId xmlns:a16="http://schemas.microsoft.com/office/drawing/2014/main" id="{B3E670AA-180D-89FD-9DF5-4BA5DFFFF120}"/>
-            </a:ext>
-          </a:extLst>
-        </p:cNvPr>
-        <p:cNvGrpSpPr/>
-        <p:nvPr/>
-      </p:nvGrpSpPr>
-      <p:grpSpPr>
-        <a:xfrm>
-          <a:off x="0" y="0"/>
-          <a:ext cx="0" cy="0"/>
-          <a:chOff x="0" y="0"/>
-          <a:chExt cx="0" cy="0"/>
-        </a:xfrm>
-      </p:grpSpPr>
-      <p:sp>
-        <p:nvSpPr>
-          <p:cNvPr id="2" name="Title 1">
-            <a:extLst>
-              <a:ext uri="{FF2B5EF4-FFF2-40B4-BE49-F238E27FC236}">
-                <a16:creationId xmlns:a16="http://schemas.microsoft.com/office/drawing/2014/main" id="{8059BF36-54D6-BAC4-5788-EB5D7FC1BEA8}"/>
-              </a:ext>
-            </a:extLst>
-          </p:cNvPr>
-          <p:cNvSpPr>
-            <a:spLocks noGrp="1"/>
-          </p:cNvSpPr>
-          <p:nvPr>
-            <p:ph type="title"/>
-          </p:nvPr>
-        </p:nvSpPr>
-        <p:spPr>
-          <a:xfrm>
-            <a:off x="922477" y="162585"/>
-            <a:ext cx="9378462" cy="1103508"/>
-          </a:xfrm>
-        </p:spPr>
-        <p:txBody>
-          <a:bodyPr>
-            <a:normAutofit fontScale="90000"/>
-          </a:bodyPr>
-          <a:lstStyle/>
-          <a:p>
-            <a:r>
-              <a:rPr lang="en-US" altLang="zh-CN" sz="4000" b="1" dirty="0"/>
-              <a:t>Sensitivity</a:t>
-            </a:r>
-            <a:br>
-              <a:rPr lang="en-US" altLang="zh-CN" sz="4000" b="1" dirty="0"/>
-            </a:br>
-            <a:r>
-              <a:rPr lang="en-US" altLang="zh-CN" sz="4000" b="1" dirty="0"/>
-              <a:t>-Baseline and Prams Range</a:t>
-            </a:r>
-            <a:endParaRPr lang="zh-CN" altLang="en-US" b="1" dirty="0">
-              <a:solidFill>
-                <a:srgbClr val="FF0000"/>
-              </a:solidFill>
-            </a:endParaRPr>
-          </a:p>
-        </p:txBody>
-      </p:sp>
-      <p:pic>
-        <p:nvPicPr>
-          <p:cNvPr id="8" name="Picture 7">
-            <a:extLst>
-              <a:ext uri="{FF2B5EF4-FFF2-40B4-BE49-F238E27FC236}">
-                <a16:creationId xmlns:a16="http://schemas.microsoft.com/office/drawing/2014/main" id="{76461D51-F98C-58BA-4FDB-C6DB99883FC1}"/>
-              </a:ext>
-            </a:extLst>
-          </p:cNvPr>
-          <p:cNvPicPr>
-            <a:picLocks noChangeAspect="1"/>
-          </p:cNvPicPr>
-          <p:nvPr/>
-        </p:nvPicPr>
-        <p:blipFill>
-          <a:blip r:embed="rId2"/>
-          <a:stretch>
-            <a:fillRect/>
-          </a:stretch>
-        </p:blipFill>
-        <p:spPr>
-          <a:xfrm>
-            <a:off x="922477" y="1333649"/>
-            <a:ext cx="9570206" cy="5182297"/>
-          </a:xfrm>
-          <a:prstGeom prst="rect">
-            <a:avLst/>
-          </a:prstGeom>
-        </p:spPr>
-      </p:pic>
-    </p:spTree>
-    <p:extLst>
-      <p:ext uri="{BB962C8B-B14F-4D97-AF65-F5344CB8AC3E}">
-        <p14:creationId xmlns:p14="http://schemas.microsoft.com/office/powerpoint/2010/main" val="971848892"/>
-      </p:ext>
-    </p:extLst>
-  </p:cSld>
-  <p:clrMapOvr>
-    <a:masterClrMapping/>
-  </p:clrMapOvr>
-</p:sld>
-</file>
-
-<file path=ppt/slides/slide16.xml><?xml version="1.0" encoding="utf-8"?>
-<p:sld xmlns:a="http://schemas.openxmlformats.org/drawingml/2006/main" xmlns:r="http://schemas.openxmlformats.org/officeDocument/2006/relationships" xmlns:p="http://schemas.openxmlformats.org/presentationml/2006/main">
-  <p:cSld>
-    <p:spTree>
-      <p:nvGrpSpPr>
-        <p:cNvPr id="1" name="">
-          <a:extLst>
-            <a:ext uri="{FF2B5EF4-FFF2-40B4-BE49-F238E27FC236}">
-              <a16:creationId xmlns:a16="http://schemas.microsoft.com/office/drawing/2014/main" id="{85D8184F-E3A1-0CE4-0BDE-3340D0204039}"/>
-            </a:ext>
-          </a:extLst>
-        </p:cNvPr>
-        <p:cNvGrpSpPr/>
-        <p:nvPr/>
-      </p:nvGrpSpPr>
-      <p:grpSpPr>
-        <a:xfrm>
-          <a:off x="0" y="0"/>
-          <a:ext cx="0" cy="0"/>
-          <a:chOff x="0" y="0"/>
-          <a:chExt cx="0" cy="0"/>
-        </a:xfrm>
-      </p:grpSpPr>
-      <p:sp>
-        <p:nvSpPr>
-          <p:cNvPr id="2" name="Title 1">
-            <a:extLst>
-              <a:ext uri="{FF2B5EF4-FFF2-40B4-BE49-F238E27FC236}">
-                <a16:creationId xmlns:a16="http://schemas.microsoft.com/office/drawing/2014/main" id="{C122E3DA-4961-9566-0BC0-EE6AF6663171}"/>
-              </a:ext>
-            </a:extLst>
-          </p:cNvPr>
-          <p:cNvSpPr>
-            <a:spLocks noGrp="1"/>
-          </p:cNvSpPr>
-          <p:nvPr>
-            <p:ph type="title"/>
-          </p:nvPr>
-        </p:nvSpPr>
-        <p:spPr>
-          <a:xfrm>
-            <a:off x="922477" y="162585"/>
-            <a:ext cx="9378462" cy="1103508"/>
-          </a:xfrm>
-        </p:spPr>
-        <p:txBody>
-          <a:bodyPr>
-            <a:normAutofit fontScale="90000"/>
-          </a:bodyPr>
-          <a:lstStyle/>
-          <a:p>
-            <a:r>
-              <a:rPr lang="en-US" altLang="zh-CN" sz="4000" b="1" dirty="0"/>
-              <a:t>Sensitivity</a:t>
-            </a:r>
-            <a:br>
-              <a:rPr lang="en-US" altLang="zh-CN" sz="4000" b="1" dirty="0"/>
-            </a:br>
-            <a:r>
-              <a:rPr lang="en-US" altLang="zh-CN" sz="4000" b="1" dirty="0"/>
-              <a:t>-Result without HCO3init</a:t>
-            </a:r>
-            <a:endParaRPr lang="zh-CN" altLang="en-US" b="1" dirty="0">
-              <a:solidFill>
-                <a:srgbClr val="FF0000"/>
-              </a:solidFill>
-            </a:endParaRPr>
-          </a:p>
-        </p:txBody>
-      </p:sp>
-      <p:pic>
-        <p:nvPicPr>
-          <p:cNvPr id="5" name="Picture 4">
-            <a:extLst>
-              <a:ext uri="{FF2B5EF4-FFF2-40B4-BE49-F238E27FC236}">
-                <a16:creationId xmlns:a16="http://schemas.microsoft.com/office/drawing/2014/main" id="{FE54F9CF-F46C-88EA-0912-4F6F2F7920AA}"/>
-              </a:ext>
-            </a:extLst>
-          </p:cNvPr>
-          <p:cNvPicPr>
-            <a:picLocks noChangeAspect="1"/>
-          </p:cNvPicPr>
-          <p:nvPr/>
-        </p:nvPicPr>
-        <p:blipFill>
-          <a:blip r:embed="rId2"/>
-          <a:stretch>
-            <a:fillRect/>
-          </a:stretch>
-        </p:blipFill>
-        <p:spPr>
-          <a:xfrm>
-            <a:off x="61844" y="457894"/>
-            <a:ext cx="12192000" cy="6295014"/>
-          </a:xfrm>
-          <a:prstGeom prst="rect">
-            <a:avLst/>
-          </a:prstGeom>
-        </p:spPr>
-      </p:pic>
-    </p:spTree>
-    <p:extLst>
-      <p:ext uri="{BB962C8B-B14F-4D97-AF65-F5344CB8AC3E}">
-        <p14:creationId xmlns:p14="http://schemas.microsoft.com/office/powerpoint/2010/main" val="3994379746"/>
-      </p:ext>
-    </p:extLst>
-  </p:cSld>
-  <p:clrMapOvr>
-    <a:masterClrMapping/>
-  </p:clrMapOvr>
-</p:sld>
-</file>
-
-<file path=ppt/slides/slide17.xml><?xml version="1.0" encoding="utf-8"?>
-<p:sld xmlns:a="http://schemas.openxmlformats.org/drawingml/2006/main" xmlns:r="http://schemas.openxmlformats.org/officeDocument/2006/relationships" xmlns:p="http://schemas.openxmlformats.org/presentationml/2006/main">
-  <p:cSld>
-    <p:spTree>
-      <p:nvGrpSpPr>
-        <p:cNvPr id="1" name="">
-          <a:extLst>
-            <a:ext uri="{FF2B5EF4-FFF2-40B4-BE49-F238E27FC236}">
-              <a16:creationId xmlns:a16="http://schemas.microsoft.com/office/drawing/2014/main" id="{D566B343-FFA2-7591-91B1-CC8B2D325AE8}"/>
-            </a:ext>
-          </a:extLst>
-        </p:cNvPr>
-        <p:cNvGrpSpPr/>
-        <p:nvPr/>
-      </p:nvGrpSpPr>
-      <p:grpSpPr>
-        <a:xfrm>
-          <a:off x="0" y="0"/>
-          <a:ext cx="0" cy="0"/>
-          <a:chOff x="0" y="0"/>
-          <a:chExt cx="0" cy="0"/>
-        </a:xfrm>
-      </p:grpSpPr>
-      <p:sp>
-        <p:nvSpPr>
-          <p:cNvPr id="2" name="Title 1">
-            <a:extLst>
-              <a:ext uri="{FF2B5EF4-FFF2-40B4-BE49-F238E27FC236}">
-                <a16:creationId xmlns:a16="http://schemas.microsoft.com/office/drawing/2014/main" id="{B6A55471-9BE6-942A-8A32-CF6E913FBD8A}"/>
-              </a:ext>
-            </a:extLst>
-          </p:cNvPr>
-          <p:cNvSpPr>
-            <a:spLocks noGrp="1"/>
-          </p:cNvSpPr>
-          <p:nvPr>
-            <p:ph type="title"/>
-          </p:nvPr>
-        </p:nvSpPr>
-        <p:spPr>
-          <a:xfrm>
-            <a:off x="922477" y="162585"/>
-            <a:ext cx="9378462" cy="1103508"/>
-          </a:xfrm>
-        </p:spPr>
-        <p:txBody>
-          <a:bodyPr>
-            <a:normAutofit fontScale="90000"/>
-          </a:bodyPr>
-          <a:lstStyle/>
-          <a:p>
-            <a:r>
-              <a:rPr lang="en-US" altLang="zh-CN" sz="4000" b="1" dirty="0"/>
-              <a:t>Sensitivity</a:t>
-            </a:r>
-            <a:br>
-              <a:rPr lang="en-US" altLang="zh-CN" sz="4000" b="1" dirty="0"/>
-            </a:br>
-            <a:r>
-              <a:rPr lang="en-US" altLang="zh-CN" sz="4000" b="1" dirty="0"/>
-              <a:t>-Result with HCO3init</a:t>
-            </a:r>
-            <a:endParaRPr lang="zh-CN" altLang="en-US" b="1" dirty="0">
-              <a:solidFill>
-                <a:srgbClr val="FF0000"/>
-              </a:solidFill>
-            </a:endParaRPr>
-          </a:p>
-        </p:txBody>
-      </p:sp>
-      <p:pic>
-        <p:nvPicPr>
-          <p:cNvPr id="4" name="Picture 3">
-            <a:extLst>
-              <a:ext uri="{FF2B5EF4-FFF2-40B4-BE49-F238E27FC236}">
-                <a16:creationId xmlns:a16="http://schemas.microsoft.com/office/drawing/2014/main" id="{CC5F728C-6FAE-91E9-149D-BFE262B978A1}"/>
-              </a:ext>
-            </a:extLst>
-          </p:cNvPr>
-          <p:cNvPicPr>
-            <a:picLocks noChangeAspect="1"/>
-          </p:cNvPicPr>
-          <p:nvPr/>
-        </p:nvPicPr>
-        <p:blipFill>
-          <a:blip r:embed="rId2"/>
-          <a:stretch>
-            <a:fillRect/>
-          </a:stretch>
-        </p:blipFill>
-        <p:spPr>
-          <a:xfrm>
-            <a:off x="176695" y="546058"/>
-            <a:ext cx="12192000" cy="6630205"/>
-          </a:xfrm>
-          <a:prstGeom prst="rect">
-            <a:avLst/>
-          </a:prstGeom>
-        </p:spPr>
-      </p:pic>
-    </p:spTree>
-    <p:extLst>
-      <p:ext uri="{BB962C8B-B14F-4D97-AF65-F5344CB8AC3E}">
-        <p14:creationId xmlns:p14="http://schemas.microsoft.com/office/powerpoint/2010/main" val="3419194241"/>
-      </p:ext>
-    </p:extLst>
-  </p:cSld>
-  <p:clrMapOvr>
-    <a:masterClrMapping/>
-  </p:clrMapOvr>
-</p:sld>
-</file>
-
-<file path=ppt/slides/slide18.xml><?xml version="1.0" encoding="utf-8"?>
 <p:sld xmlns:a="http://schemas.openxmlformats.org/drawingml/2006/main" xmlns:r="http://schemas.openxmlformats.org/officeDocument/2006/relationships" xmlns:p="http://schemas.openxmlformats.org/presentationml/2006/main">
   <p:cSld>
     <p:spTree>

--- a/River Sediment Modeling.pptx
+++ b/River Sediment Modeling.pptx
@@ -5,7 +5,7 @@
     <p:sldMasterId id="2147483648" r:id="rId1"/>
   </p:sldMasterIdLst>
   <p:notesMasterIdLst>
-    <p:notesMasterId r:id="rId16"/>
+    <p:notesMasterId r:id="rId17"/>
   </p:notesMasterIdLst>
   <p:sldIdLst>
     <p:sldId id="256" r:id="rId2"/>
@@ -22,6 +22,7 @@
     <p:sldId id="272" r:id="rId13"/>
     <p:sldId id="274" r:id="rId14"/>
     <p:sldId id="270" r:id="rId15"/>
+    <p:sldId id="275" r:id="rId16"/>
   </p:sldIdLst>
   <p:sldSz cx="12192000" cy="6858000"/>
   <p:notesSz cx="6858000" cy="9144000"/>
@@ -210,7 +211,7 @@
           <a:p>
             <a:fld id="{57470B58-3F5F-4379-A1B1-C38E5919F3EB}" type="datetimeFigureOut">
               <a:rPr lang="zh-CN" altLang="en-US" smtClean="0"/>
-              <a:t>2026/3/23</a:t>
+              <a:t>2026/5/11</a:t>
             </a:fld>
             <a:endParaRPr lang="zh-CN" altLang="en-US"/>
           </a:p>
@@ -711,7 +712,7 @@
           <a:p>
             <a:fld id="{59A356CC-D3AA-463A-A30D-8B12EA0FD574}" type="datetimeFigureOut">
               <a:rPr lang="zh-CN" altLang="en-US" smtClean="0"/>
-              <a:t>2026/3/23</a:t>
+              <a:t>2026/5/11</a:t>
             </a:fld>
             <a:endParaRPr lang="zh-CN" altLang="en-US"/>
           </a:p>
@@ -911,7 +912,7 @@
           <a:p>
             <a:fld id="{59A356CC-D3AA-463A-A30D-8B12EA0FD574}" type="datetimeFigureOut">
               <a:rPr lang="zh-CN" altLang="en-US" smtClean="0"/>
-              <a:t>2026/3/23</a:t>
+              <a:t>2026/5/11</a:t>
             </a:fld>
             <a:endParaRPr lang="zh-CN" altLang="en-US"/>
           </a:p>
@@ -1121,7 +1122,7 @@
           <a:p>
             <a:fld id="{59A356CC-D3AA-463A-A30D-8B12EA0FD574}" type="datetimeFigureOut">
               <a:rPr lang="zh-CN" altLang="en-US" smtClean="0"/>
-              <a:t>2026/3/23</a:t>
+              <a:t>2026/5/11</a:t>
             </a:fld>
             <a:endParaRPr lang="zh-CN" altLang="en-US"/>
           </a:p>
@@ -1321,7 +1322,7 @@
           <a:p>
             <a:fld id="{59A356CC-D3AA-463A-A30D-8B12EA0FD574}" type="datetimeFigureOut">
               <a:rPr lang="zh-CN" altLang="en-US" smtClean="0"/>
-              <a:t>2026/3/23</a:t>
+              <a:t>2026/5/11</a:t>
             </a:fld>
             <a:endParaRPr lang="zh-CN" altLang="en-US"/>
           </a:p>
@@ -1597,7 +1598,7 @@
           <a:p>
             <a:fld id="{59A356CC-D3AA-463A-A30D-8B12EA0FD574}" type="datetimeFigureOut">
               <a:rPr lang="zh-CN" altLang="en-US" smtClean="0"/>
-              <a:t>2026/3/23</a:t>
+              <a:t>2026/5/11</a:t>
             </a:fld>
             <a:endParaRPr lang="zh-CN" altLang="en-US"/>
           </a:p>
@@ -1865,7 +1866,7 @@
           <a:p>
             <a:fld id="{59A356CC-D3AA-463A-A30D-8B12EA0FD574}" type="datetimeFigureOut">
               <a:rPr lang="zh-CN" altLang="en-US" smtClean="0"/>
-              <a:t>2026/3/23</a:t>
+              <a:t>2026/5/11</a:t>
             </a:fld>
             <a:endParaRPr lang="zh-CN" altLang="en-US"/>
           </a:p>
@@ -2280,7 +2281,7 @@
           <a:p>
             <a:fld id="{59A356CC-D3AA-463A-A30D-8B12EA0FD574}" type="datetimeFigureOut">
               <a:rPr lang="zh-CN" altLang="en-US" smtClean="0"/>
-              <a:t>2026/3/23</a:t>
+              <a:t>2026/5/11</a:t>
             </a:fld>
             <a:endParaRPr lang="zh-CN" altLang="en-US"/>
           </a:p>
@@ -2422,7 +2423,7 @@
           <a:p>
             <a:fld id="{59A356CC-D3AA-463A-A30D-8B12EA0FD574}" type="datetimeFigureOut">
               <a:rPr lang="zh-CN" altLang="en-US" smtClean="0"/>
-              <a:t>2026/3/23</a:t>
+              <a:t>2026/5/11</a:t>
             </a:fld>
             <a:endParaRPr lang="zh-CN" altLang="en-US"/>
           </a:p>
@@ -2535,7 +2536,7 @@
           <a:p>
             <a:fld id="{59A356CC-D3AA-463A-A30D-8B12EA0FD574}" type="datetimeFigureOut">
               <a:rPr lang="zh-CN" altLang="en-US" smtClean="0"/>
-              <a:t>2026/3/23</a:t>
+              <a:t>2026/5/11</a:t>
             </a:fld>
             <a:endParaRPr lang="zh-CN" altLang="en-US"/>
           </a:p>
@@ -2848,7 +2849,7 @@
           <a:p>
             <a:fld id="{59A356CC-D3AA-463A-A30D-8B12EA0FD574}" type="datetimeFigureOut">
               <a:rPr lang="zh-CN" altLang="en-US" smtClean="0"/>
-              <a:t>2026/3/23</a:t>
+              <a:t>2026/5/11</a:t>
             </a:fld>
             <a:endParaRPr lang="zh-CN" altLang="en-US"/>
           </a:p>
@@ -3137,7 +3138,7 @@
           <a:p>
             <a:fld id="{59A356CC-D3AA-463A-A30D-8B12EA0FD574}" type="datetimeFigureOut">
               <a:rPr lang="zh-CN" altLang="en-US" smtClean="0"/>
-              <a:t>2026/3/23</a:t>
+              <a:t>2026/5/11</a:t>
             </a:fld>
             <a:endParaRPr lang="zh-CN" altLang="en-US"/>
           </a:p>
@@ -3380,7 +3381,7 @@
           <a:p>
             <a:fld id="{59A356CC-D3AA-463A-A30D-8B12EA0FD574}" type="datetimeFigureOut">
               <a:rPr lang="zh-CN" altLang="en-US" smtClean="0"/>
-              <a:t>2026/3/23</a:t>
+              <a:t>2026/5/11</a:t>
             </a:fld>
             <a:endParaRPr lang="zh-CN" altLang="en-US"/>
           </a:p>
@@ -5258,12 +5259,21 @@
             <p:ph type="title"/>
           </p:nvPr>
         </p:nvSpPr>
-        <p:spPr/>
+        <p:spPr>
+          <a:xfrm>
+            <a:off x="838200" y="137268"/>
+            <a:ext cx="10515600" cy="794718"/>
+          </a:xfrm>
+        </p:spPr>
         <p:txBody>
           <a:bodyPr/>
           <a:lstStyle/>
           <a:p>
-            <a:endParaRPr lang="zh-CN" altLang="en-US"/>
+            <a:r>
+              <a:rPr lang="en-US" altLang="zh-CN" dirty="0"/>
+              <a:t>Estuary</a:t>
+            </a:r>
+            <a:endParaRPr lang="zh-CN" altLang="en-US" dirty="0"/>
           </a:p>
         </p:txBody>
       </p:sp>
@@ -5292,10 +5302,161 @@
           </a:p>
         </p:txBody>
       </p:sp>
+      <p:pic>
+        <p:nvPicPr>
+          <p:cNvPr id="5" name="Picture 4">
+            <a:extLst>
+              <a:ext uri="{FF2B5EF4-FFF2-40B4-BE49-F238E27FC236}">
+                <a16:creationId xmlns:a16="http://schemas.microsoft.com/office/drawing/2014/main" id="{F6DF74B4-738F-CD35-34A9-6616774C3B3C}"/>
+              </a:ext>
+            </a:extLst>
+          </p:cNvPr>
+          <p:cNvPicPr>
+            <a:picLocks noChangeAspect="1"/>
+          </p:cNvPicPr>
+          <p:nvPr/>
+        </p:nvPicPr>
+        <p:blipFill>
+          <a:blip r:embed="rId2"/>
+          <a:stretch>
+            <a:fillRect/>
+          </a:stretch>
+        </p:blipFill>
+        <p:spPr>
+          <a:xfrm>
+            <a:off x="-41031" y="800049"/>
+            <a:ext cx="12192000" cy="6148856"/>
+          </a:xfrm>
+          <a:prstGeom prst="rect">
+            <a:avLst/>
+          </a:prstGeom>
+        </p:spPr>
+      </p:pic>
     </p:spTree>
     <p:extLst>
       <p:ext uri="{BB962C8B-B14F-4D97-AF65-F5344CB8AC3E}">
         <p14:creationId xmlns:p14="http://schemas.microsoft.com/office/powerpoint/2010/main" val="3670330232"/>
+      </p:ext>
+    </p:extLst>
+  </p:cSld>
+  <p:clrMapOvr>
+    <a:masterClrMapping/>
+  </p:clrMapOvr>
+</p:sld>
+</file>
+
+<file path=ppt/slides/slide15.xml><?xml version="1.0" encoding="utf-8"?>
+<p:sld xmlns:a="http://schemas.openxmlformats.org/drawingml/2006/main" xmlns:r="http://schemas.openxmlformats.org/officeDocument/2006/relationships" xmlns:p="http://schemas.openxmlformats.org/presentationml/2006/main">
+  <p:cSld>
+    <p:spTree>
+      <p:nvGrpSpPr>
+        <p:cNvPr id="1" name=""/>
+        <p:cNvGrpSpPr/>
+        <p:nvPr/>
+      </p:nvGrpSpPr>
+      <p:grpSpPr>
+        <a:xfrm>
+          <a:off x="0" y="0"/>
+          <a:ext cx="0" cy="0"/>
+          <a:chOff x="0" y="0"/>
+          <a:chExt cx="0" cy="0"/>
+        </a:xfrm>
+      </p:grpSpPr>
+      <p:sp>
+        <p:nvSpPr>
+          <p:cNvPr id="2" name="Title 1">
+            <a:extLst>
+              <a:ext uri="{FF2B5EF4-FFF2-40B4-BE49-F238E27FC236}">
+                <a16:creationId xmlns:a16="http://schemas.microsoft.com/office/drawing/2014/main" id="{CC2DE1A5-F76A-001B-5229-FDEE542B9384}"/>
+              </a:ext>
+            </a:extLst>
+          </p:cNvPr>
+          <p:cNvSpPr>
+            <a:spLocks noGrp="1"/>
+          </p:cNvSpPr>
+          <p:nvPr>
+            <p:ph type="title"/>
+          </p:nvPr>
+        </p:nvSpPr>
+        <p:spPr>
+          <a:xfrm>
+            <a:off x="838200" y="77910"/>
+            <a:ext cx="10515600" cy="672367"/>
+          </a:xfrm>
+        </p:spPr>
+        <p:txBody>
+          <a:bodyPr>
+            <a:normAutofit fontScale="90000"/>
+          </a:bodyPr>
+          <a:lstStyle/>
+          <a:p>
+            <a:r>
+              <a:rPr lang="en-US" altLang="zh-CN" dirty="0"/>
+              <a:t>Freshwater</a:t>
+            </a:r>
+            <a:endParaRPr lang="zh-CN" altLang="en-US" dirty="0"/>
+          </a:p>
+        </p:txBody>
+      </p:sp>
+      <p:sp>
+        <p:nvSpPr>
+          <p:cNvPr id="3" name="Content Placeholder 2">
+            <a:extLst>
+              <a:ext uri="{FF2B5EF4-FFF2-40B4-BE49-F238E27FC236}">
+                <a16:creationId xmlns:a16="http://schemas.microsoft.com/office/drawing/2014/main" id="{73F9D540-D11D-7ECE-F946-24601D60CC2C}"/>
+              </a:ext>
+            </a:extLst>
+          </p:cNvPr>
+          <p:cNvSpPr>
+            <a:spLocks noGrp="1"/>
+          </p:cNvSpPr>
+          <p:nvPr>
+            <p:ph idx="1"/>
+          </p:nvPr>
+        </p:nvSpPr>
+        <p:spPr/>
+        <p:txBody>
+          <a:bodyPr/>
+          <a:lstStyle/>
+          <a:p>
+            <a:endParaRPr lang="zh-CN" altLang="en-US"/>
+          </a:p>
+        </p:txBody>
+      </p:sp>
+      <p:pic>
+        <p:nvPicPr>
+          <p:cNvPr id="5" name="Picture 4">
+            <a:extLst>
+              <a:ext uri="{FF2B5EF4-FFF2-40B4-BE49-F238E27FC236}">
+                <a16:creationId xmlns:a16="http://schemas.microsoft.com/office/drawing/2014/main" id="{3E2D11FE-DB79-1708-8E59-F8423725906C}"/>
+              </a:ext>
+            </a:extLst>
+          </p:cNvPr>
+          <p:cNvPicPr>
+            <a:picLocks noChangeAspect="1"/>
+          </p:cNvPicPr>
+          <p:nvPr/>
+        </p:nvPicPr>
+        <p:blipFill>
+          <a:blip r:embed="rId2"/>
+          <a:stretch>
+            <a:fillRect/>
+          </a:stretch>
+        </p:blipFill>
+        <p:spPr>
+          <a:xfrm>
+            <a:off x="0" y="681037"/>
+            <a:ext cx="12192000" cy="6433647"/>
+          </a:xfrm>
+          <a:prstGeom prst="rect">
+            <a:avLst/>
+          </a:prstGeom>
+        </p:spPr>
+      </p:pic>
+    </p:spTree>
+    <p:extLst>
+      <p:ext uri="{BB962C8B-B14F-4D97-AF65-F5344CB8AC3E}">
+        <p14:creationId xmlns:p14="http://schemas.microsoft.com/office/powerpoint/2010/main" val="1610190919"/>
       </p:ext>
     </p:extLst>
   </p:cSld>
